--- a/classes/parte-4-seguridad-de-aplicaciones-web/101-fallos-de-autenticacion-y-bypass/clase-101-presentacion.pptx
+++ b/classes/parte-4-seguridad-de-aplicaciones-web/101-fallos-de-autenticacion-y-bypass/clase-101-presentacion.pptx
@@ -17,6 +17,9 @@
     <p:sldId id="265" r:id="rId16"/>
     <p:sldId id="266" r:id="rId17"/>
     <p:sldId id="267" r:id="rId18"/>
+    <p:sldId id="268" r:id="rId19"/>
+    <p:sldId id="269" r:id="rId20"/>
+    <p:sldId id="270" r:id="rId21"/>
   </p:sldIdLst>
   <p:sldSz cx="9144000" cy="6858000" type="screen4x3"/>
   <p:notesSz cx="6858000" cy="9144000"/>
@@ -3198,7 +3201,7 @@
                   <a:srgbClr val="0B3D2E"/>
                 </a:solidFill>
               </a:rPr>
-              <a:t>⚠️ Errores comunes</a:t>
+              <a:t>✍️ Ejercicios</a:t>
             </a:r>
           </a:p>
         </p:txBody>
@@ -3236,67 +3239,82 @@
                   <a:srgbClr val="22282E"/>
                 </a:solidFill>
               </a:rPr>
-              <a:t>•  Bloqueo tras pocos intentos — Rate limiting; rota IPs (en lab) o busca otro vector</a:t>
-            </a:r>
-          </a:p>
-          <a:p>
-            <a:pPr>
-              <a:spcAft>
-                <a:spcPts val="600"/>
-              </a:spcAft>
-            </a:pPr>
-            <a:r>
-              <a:rPr sz="1500">
-                <a:solidFill>
-                  <a:srgbClr val="22282E"/>
-                </a:solidFill>
-              </a:rPr>
-              <a:t>•  Mensajes idénticos siempre — Sin enumeración por mensaje; prueba por tiempo</a:t>
-            </a:r>
-          </a:p>
-          <a:p>
-            <a:pPr>
-              <a:spcAft>
-                <a:spcPts val="600"/>
-              </a:spcAft>
-            </a:pPr>
-            <a:r>
-              <a:rPr sz="1500">
-                <a:solidFill>
-                  <a:srgbClr val="22282E"/>
-                </a:solidFill>
-              </a:rPr>
-              <a:t>•  Token de reset aleatorio — Bien diseñado; busca reuso o falta de expiración</a:t>
-            </a:r>
-          </a:p>
-          <a:p>
-            <a:pPr>
-              <a:spcAft>
-                <a:spcPts val="600"/>
-              </a:spcAft>
-            </a:pPr>
-            <a:r>
-              <a:rPr sz="1500">
-                <a:solidFill>
-                  <a:srgbClr val="22282E"/>
-                </a:solidFill>
-              </a:rPr>
-              <a:t>•  MFA no bypasseable — Implementación correcta; documenta como fortaleza</a:t>
-            </a:r>
-          </a:p>
-          <a:p>
-            <a:pPr>
-              <a:spcAft>
-                <a:spcPts val="600"/>
-              </a:spcAft>
-            </a:pPr>
-            <a:r>
-              <a:rPr sz="1500">
-                <a:solidFill>
-                  <a:srgbClr val="22282E"/>
-                </a:solidFill>
-              </a:rPr>
-              <a:t>•  Fuerza bruta sin éxito — Contraseña fuerte; prueba stuffing con listas reales</a:t>
+              <a:t>•  Detecta enumeración de usuarios por mensaje y por tiempo, por separado.</a:t>
+            </a:r>
+          </a:p>
+          <a:p>
+            <a:pPr>
+              <a:spcAft>
+                <a:spcPts val="600"/>
+              </a:spcAft>
+            </a:pPr>
+            <a:r>
+              <a:rPr sz="1500">
+                <a:solidFill>
+                  <a:srgbClr val="22282E"/>
+                </a:solidFill>
+              </a:rPr>
+              <a:t>•  Diseña un ataque de credential stuffing y explica su defensa (MFA, detección de reuso).</a:t>
+            </a:r>
+          </a:p>
+          <a:p>
+            <a:pPr>
+              <a:spcAft>
+                <a:spcPts val="600"/>
+              </a:spcAft>
+            </a:pPr>
+            <a:r>
+              <a:rPr sz="1500">
+                <a:solidFill>
+                  <a:srgbClr val="22282E"/>
+                </a:solidFill>
+              </a:rPr>
+              <a:t>•  Analiza un token de reset y evalúa su entropía y expiración.</a:t>
+            </a:r>
+          </a:p>
+          <a:p>
+            <a:pPr>
+              <a:spcAft>
+                <a:spcPts val="600"/>
+              </a:spcAft>
+            </a:pPr>
+            <a:r>
+              <a:rPr sz="1500">
+                <a:solidFill>
+                  <a:srgbClr val="22282E"/>
+                </a:solidFill>
+              </a:rPr>
+              <a:t>•  Enumera 4 bypass de MFA reales y cómo prevenirlos.</a:t>
+            </a:r>
+          </a:p>
+          <a:p>
+            <a:pPr>
+              <a:spcAft>
+                <a:spcPts val="600"/>
+              </a:spcAft>
+            </a:pPr>
+            <a:r>
+              <a:rPr sz="1500">
+                <a:solidFill>
+                  <a:srgbClr val="22282E"/>
+                </a:solidFill>
+              </a:rPr>
+              <a:t>•  Explica por qué los mensajes de error deben ser genéricos.</a:t>
+            </a:r>
+          </a:p>
+          <a:p>
+            <a:pPr>
+              <a:spcAft>
+                <a:spcPts val="600"/>
+              </a:spcAft>
+            </a:pPr>
+            <a:r>
+              <a:rPr sz="1500">
+                <a:solidFill>
+                  <a:srgbClr val="22282E"/>
+                </a:solidFill>
+              </a:rPr>
+              <a:t>•  Diseña una política de rate limiting sensata (por cuenta y por IP).</a:t>
             </a:r>
           </a:p>
         </p:txBody>
@@ -3347,7 +3365,7 @@
                   <a:srgbClr val="0B3D2E"/>
                 </a:solidFill>
               </a:rPr>
-              <a:t>❓ Preguntas frecuentes</a:t>
+              <a:t>📝 Reto verificable</a:t>
             </a:r>
           </a:p>
         </p:txBody>
@@ -3385,82 +3403,22 @@
                   <a:srgbClr val="22282E"/>
                 </a:solidFill>
               </a:rPr>
-              <a:t>•  ❓ ¿La MFA elimina la fuerza bruta?</a:t>
-            </a:r>
-          </a:p>
-          <a:p>
-            <a:pPr>
-              <a:spcAft>
-                <a:spcPts val="600"/>
-              </a:spcAft>
-            </a:pPr>
-            <a:r>
-              <a:rPr sz="1500">
-                <a:solidFill>
-                  <a:srgbClr val="22282E"/>
-                </a:solidFill>
-              </a:rPr>
-              <a:t>•  Reduce mucho el riesgo, pero un segundo factor mal implementado (sin límite, reusable) puede saltarse.</a:t>
-            </a:r>
-          </a:p>
-          <a:p>
-            <a:pPr>
-              <a:spcAft>
-                <a:spcPts val="600"/>
-              </a:spcAft>
-            </a:pPr>
-            <a:r>
-              <a:rPr sz="1500">
-                <a:solidFill>
-                  <a:srgbClr val="22282E"/>
-                </a:solidFill>
-              </a:rPr>
-              <a:t>•  ❓ ¿Por qué importan los tiempos de respuesta?</a:t>
-            </a:r>
-          </a:p>
-          <a:p>
-            <a:pPr>
-              <a:spcAft>
-                <a:spcPts val="600"/>
-              </a:spcAft>
-            </a:pPr>
-            <a:r>
-              <a:rPr sz="1500">
-                <a:solidFill>
-                  <a:srgbClr val="22282E"/>
-                </a:solidFill>
-              </a:rPr>
-              <a:t>•  Porque una diferencia consistente entre usuario válido e inválido filtra información aunque los mensajes sean iguales.</a:t>
-            </a:r>
-          </a:p>
-          <a:p>
-            <a:pPr>
-              <a:spcAft>
-                <a:spcPts val="600"/>
-              </a:spcAft>
-            </a:pPr>
-            <a:r>
-              <a:rPr sz="1500">
-                <a:solidFill>
-                  <a:srgbClr val="22282E"/>
-                </a:solidFill>
-              </a:rPr>
-              <a:t>•  ❓ ¿Bloquear la cuenta es buena defensa?</a:t>
-            </a:r>
-          </a:p>
-          <a:p>
-            <a:pPr>
-              <a:spcAft>
-                <a:spcPts val="600"/>
-              </a:spcAft>
-            </a:pPr>
-            <a:r>
-              <a:rPr sz="1500">
-                <a:solidFill>
-                  <a:srgbClr val="22282E"/>
-                </a:solidFill>
-              </a:rPr>
-              <a:t>•  Puede provocar denegación de servicio. Mejor combinar rate limiting, MFA y detección de anomalías.</a:t>
+              <a:t>•  Resuelve un lab de PortSwigger que combine enumeración de usuarios + fuerza bruta y accede a la cuenta objetivo, o un lab de bypass de MFA.</a:t>
+            </a:r>
+          </a:p>
+          <a:p>
+            <a:pPr>
+              <a:spcAft>
+                <a:spcPts val="600"/>
+              </a:spcAft>
+            </a:pPr>
+            <a:r>
+              <a:rPr sz="1500">
+                <a:solidFill>
+                  <a:srgbClr val="22282E"/>
+                </a:solidFill>
+              </a:rPr>
+              <a:t>•  Criterio de aceptación: el lab queda resuelto, documentas la señal que reveló el usuario válido (o el fallo de MFA), la credencial/técnica y los controles que lo habrían evitado.</a:t>
             </a:r>
           </a:p>
         </p:txBody>
@@ -3511,7 +3469,7 @@
                   <a:srgbClr val="0B3D2E"/>
                 </a:solidFill>
               </a:rPr>
-              <a:t>🔗 Referencias</a:t>
+              <a:t>⚠️ Errores comunes</a:t>
             </a:r>
           </a:p>
         </p:txBody>
@@ -3549,6 +3507,319 @@
                   <a:srgbClr val="22282E"/>
                 </a:solidFill>
               </a:rPr>
+              <a:t>•  Bloqueo tras pocos intentos — Rate limiting; rota IPs (en lab) o busca otro vector</a:t>
+            </a:r>
+          </a:p>
+          <a:p>
+            <a:pPr>
+              <a:spcAft>
+                <a:spcPts val="600"/>
+              </a:spcAft>
+            </a:pPr>
+            <a:r>
+              <a:rPr sz="1500">
+                <a:solidFill>
+                  <a:srgbClr val="22282E"/>
+                </a:solidFill>
+              </a:rPr>
+              <a:t>•  Mensajes idénticos siempre — Sin enumeración por mensaje; prueba por tiempo</a:t>
+            </a:r>
+          </a:p>
+          <a:p>
+            <a:pPr>
+              <a:spcAft>
+                <a:spcPts val="600"/>
+              </a:spcAft>
+            </a:pPr>
+            <a:r>
+              <a:rPr sz="1500">
+                <a:solidFill>
+                  <a:srgbClr val="22282E"/>
+                </a:solidFill>
+              </a:rPr>
+              <a:t>•  Token de reset aleatorio — Bien diseñado; busca reuso o falta de expiración</a:t>
+            </a:r>
+          </a:p>
+          <a:p>
+            <a:pPr>
+              <a:spcAft>
+                <a:spcPts val="600"/>
+              </a:spcAft>
+            </a:pPr>
+            <a:r>
+              <a:rPr sz="1500">
+                <a:solidFill>
+                  <a:srgbClr val="22282E"/>
+                </a:solidFill>
+              </a:rPr>
+              <a:t>•  MFA no bypasseable — Implementación correcta; documenta como fortaleza</a:t>
+            </a:r>
+          </a:p>
+          <a:p>
+            <a:pPr>
+              <a:spcAft>
+                <a:spcPts val="600"/>
+              </a:spcAft>
+            </a:pPr>
+            <a:r>
+              <a:rPr sz="1500">
+                <a:solidFill>
+                  <a:srgbClr val="22282E"/>
+                </a:solidFill>
+              </a:rPr>
+              <a:t>•  Fuerza bruta sin éxito — Contraseña fuerte; prueba stuffing con listas reales</a:t>
+            </a:r>
+          </a:p>
+        </p:txBody>
+      </p:sp>
+    </p:spTree>
+  </p:cSld>
+  <p:clrMapOvr>
+    <a:masterClrMapping/>
+  </p:clrMapOvr>
+</p:sld>
+</file>
+
+<file path=ppt/slides/slide13.xml><?xml version="1.0" encoding="utf-8"?>
+<p:sld xmlns:a="http://schemas.openxmlformats.org/drawingml/2006/main" xmlns:p="http://schemas.openxmlformats.org/presentationml/2006/main" xmlns:r="http://schemas.openxmlformats.org/officeDocument/2006/relationships">
+  <p:cSld>
+    <p:spTree>
+      <p:nvGrpSpPr>
+        <p:cNvPr id="1" name=""/>
+        <p:cNvGrpSpPr/>
+        <p:nvPr/>
+      </p:nvGrpSpPr>
+      <p:grpSpPr/>
+      <p:sp>
+        <p:nvSpPr>
+          <p:cNvPr id="2" name="TextBox 1"/>
+          <p:cNvSpPr txBox="1"/>
+          <p:nvPr/>
+        </p:nvSpPr>
+        <p:spPr>
+          <a:xfrm>
+            <a:off x="457200" y="320040"/>
+            <a:ext cx="8229600" cy="822960"/>
+          </a:xfrm>
+          <a:prstGeom prst="rect">
+            <a:avLst/>
+          </a:prstGeom>
+          <a:noFill/>
+        </p:spPr>
+        <p:txBody>
+          <a:bodyPr wrap="square">
+            <a:spAutoFit/>
+          </a:bodyPr>
+          <a:lstStyle/>
+          <a:p>
+            <a:r>
+              <a:rPr sz="2600" b="1">
+                <a:solidFill>
+                  <a:srgbClr val="0B3D2E"/>
+                </a:solidFill>
+              </a:rPr>
+              <a:t>❓ Preguntas frecuentes</a:t>
+            </a:r>
+          </a:p>
+        </p:txBody>
+      </p:sp>
+      <p:sp>
+        <p:nvSpPr>
+          <p:cNvPr id="3" name="TextBox 2"/>
+          <p:cNvSpPr txBox="1"/>
+          <p:nvPr/>
+        </p:nvSpPr>
+        <p:spPr>
+          <a:xfrm>
+            <a:off x="457200" y="1280160"/>
+            <a:ext cx="8229600" cy="4937760"/>
+          </a:xfrm>
+          <a:prstGeom prst="rect">
+            <a:avLst/>
+          </a:prstGeom>
+          <a:noFill/>
+        </p:spPr>
+        <p:txBody>
+          <a:bodyPr wrap="square">
+            <a:spAutoFit/>
+          </a:bodyPr>
+          <a:lstStyle/>
+          <a:p>
+            <a:pPr>
+              <a:spcAft>
+                <a:spcPts val="600"/>
+              </a:spcAft>
+            </a:pPr>
+            <a:r>
+              <a:rPr sz="1500">
+                <a:solidFill>
+                  <a:srgbClr val="22282E"/>
+                </a:solidFill>
+              </a:rPr>
+              <a:t>•  ❓ ¿La MFA elimina la fuerza bruta?</a:t>
+            </a:r>
+          </a:p>
+          <a:p>
+            <a:pPr>
+              <a:spcAft>
+                <a:spcPts val="600"/>
+              </a:spcAft>
+            </a:pPr>
+            <a:r>
+              <a:rPr sz="1500">
+                <a:solidFill>
+                  <a:srgbClr val="22282E"/>
+                </a:solidFill>
+              </a:rPr>
+              <a:t>•  Reduce mucho el riesgo, pero un segundo factor mal implementado (sin límite, reusable) puede saltarse.</a:t>
+            </a:r>
+          </a:p>
+          <a:p>
+            <a:pPr>
+              <a:spcAft>
+                <a:spcPts val="600"/>
+              </a:spcAft>
+            </a:pPr>
+            <a:r>
+              <a:rPr sz="1500">
+                <a:solidFill>
+                  <a:srgbClr val="22282E"/>
+                </a:solidFill>
+              </a:rPr>
+              <a:t>•  ❓ ¿Por qué importan los tiempos de respuesta?</a:t>
+            </a:r>
+          </a:p>
+          <a:p>
+            <a:pPr>
+              <a:spcAft>
+                <a:spcPts val="600"/>
+              </a:spcAft>
+            </a:pPr>
+            <a:r>
+              <a:rPr sz="1500">
+                <a:solidFill>
+                  <a:srgbClr val="22282E"/>
+                </a:solidFill>
+              </a:rPr>
+              <a:t>•  Porque una diferencia consistente entre usuario válido e inválido filtra información aunque los mensajes sean iguales.</a:t>
+            </a:r>
+          </a:p>
+          <a:p>
+            <a:pPr>
+              <a:spcAft>
+                <a:spcPts val="600"/>
+              </a:spcAft>
+            </a:pPr>
+            <a:r>
+              <a:rPr sz="1500">
+                <a:solidFill>
+                  <a:srgbClr val="22282E"/>
+                </a:solidFill>
+              </a:rPr>
+              <a:t>•  ❓ ¿Bloquear la cuenta es buena defensa?</a:t>
+            </a:r>
+          </a:p>
+          <a:p>
+            <a:pPr>
+              <a:spcAft>
+                <a:spcPts val="600"/>
+              </a:spcAft>
+            </a:pPr>
+            <a:r>
+              <a:rPr sz="1500">
+                <a:solidFill>
+                  <a:srgbClr val="22282E"/>
+                </a:solidFill>
+              </a:rPr>
+              <a:t>•  Puede provocar denegación de servicio. Mejor combinar rate limiting, MFA y detección de anomalías.</a:t>
+            </a:r>
+          </a:p>
+        </p:txBody>
+      </p:sp>
+    </p:spTree>
+  </p:cSld>
+  <p:clrMapOvr>
+    <a:masterClrMapping/>
+  </p:clrMapOvr>
+</p:sld>
+</file>
+
+<file path=ppt/slides/slide14.xml><?xml version="1.0" encoding="utf-8"?>
+<p:sld xmlns:a="http://schemas.openxmlformats.org/drawingml/2006/main" xmlns:p="http://schemas.openxmlformats.org/presentationml/2006/main" xmlns:r="http://schemas.openxmlformats.org/officeDocument/2006/relationships">
+  <p:cSld>
+    <p:spTree>
+      <p:nvGrpSpPr>
+        <p:cNvPr id="1" name=""/>
+        <p:cNvGrpSpPr/>
+        <p:nvPr/>
+      </p:nvGrpSpPr>
+      <p:grpSpPr/>
+      <p:sp>
+        <p:nvSpPr>
+          <p:cNvPr id="2" name="TextBox 1"/>
+          <p:cNvSpPr txBox="1"/>
+          <p:nvPr/>
+        </p:nvSpPr>
+        <p:spPr>
+          <a:xfrm>
+            <a:off x="457200" y="320040"/>
+            <a:ext cx="8229600" cy="822960"/>
+          </a:xfrm>
+          <a:prstGeom prst="rect">
+            <a:avLst/>
+          </a:prstGeom>
+          <a:noFill/>
+        </p:spPr>
+        <p:txBody>
+          <a:bodyPr wrap="square">
+            <a:spAutoFit/>
+          </a:bodyPr>
+          <a:lstStyle/>
+          <a:p>
+            <a:r>
+              <a:rPr sz="2600" b="1">
+                <a:solidFill>
+                  <a:srgbClr val="0B3D2E"/>
+                </a:solidFill>
+              </a:rPr>
+              <a:t>🔗 Referencias</a:t>
+            </a:r>
+          </a:p>
+        </p:txBody>
+      </p:sp>
+      <p:sp>
+        <p:nvSpPr>
+          <p:cNvPr id="3" name="TextBox 2"/>
+          <p:cNvSpPr txBox="1"/>
+          <p:nvPr/>
+        </p:nvSpPr>
+        <p:spPr>
+          <a:xfrm>
+            <a:off x="457200" y="1280160"/>
+            <a:ext cx="8229600" cy="4937760"/>
+          </a:xfrm>
+          <a:prstGeom prst="rect">
+            <a:avLst/>
+          </a:prstGeom>
+          <a:noFill/>
+        </p:spPr>
+        <p:txBody>
+          <a:bodyPr wrap="square">
+            <a:spAutoFit/>
+          </a:bodyPr>
+          <a:lstStyle/>
+          <a:p>
+            <a:pPr>
+              <a:spcAft>
+                <a:spcPts val="600"/>
+              </a:spcAft>
+            </a:pPr>
+            <a:r>
+              <a:rPr sz="1500">
+                <a:solidFill>
+                  <a:srgbClr val="22282E"/>
+                </a:solidFill>
+              </a:rPr>
               <a:t>•  Stuttard &amp; Pinto, The Web Application Hacker's Handbook, cap. 6.</a:t>
             </a:r>
           </a:p>
@@ -3599,6 +3870,81 @@
           </a:p>
         </p:txBody>
       </p:sp>
+    </p:spTree>
+  </p:cSld>
+  <p:clrMapOvr>
+    <a:masterClrMapping/>
+  </p:clrMapOvr>
+</p:sld>
+</file>
+
+<file path=ppt/slides/slide15.xml><?xml version="1.0" encoding="utf-8"?>
+<p:sld xmlns:a="http://schemas.openxmlformats.org/drawingml/2006/main" xmlns:p="http://schemas.openxmlformats.org/presentationml/2006/main" xmlns:r="http://schemas.openxmlformats.org/officeDocument/2006/relationships">
+  <p:cSld>
+    <p:spTree>
+      <p:nvGrpSpPr>
+        <p:cNvPr id="1" name=""/>
+        <p:cNvGrpSpPr/>
+        <p:nvPr/>
+      </p:nvGrpSpPr>
+      <p:grpSpPr/>
+      <p:sp>
+        <p:nvSpPr>
+          <p:cNvPr id="2" name="TextBox 1"/>
+          <p:cNvSpPr txBox="1"/>
+          <p:nvPr/>
+        </p:nvSpPr>
+        <p:spPr>
+          <a:xfrm>
+            <a:off x="457200" y="274320"/>
+            <a:ext cx="8229600" cy="640080"/>
+          </a:xfrm>
+          <a:prstGeom prst="rect">
+            <a:avLst/>
+          </a:prstGeom>
+          <a:noFill/>
+        </p:spPr>
+        <p:txBody>
+          <a:bodyPr wrap="square">
+            <a:spAutoFit/>
+          </a:bodyPr>
+          <a:lstStyle/>
+          <a:p>
+            <a:r>
+              <a:rPr sz="2200" b="1">
+                <a:solidFill>
+                  <a:srgbClr val="0B3D2E"/>
+                </a:solidFill>
+              </a:rPr>
+              <a:t>Diagrama de la clase</a:t>
+            </a:r>
+          </a:p>
+        </p:txBody>
+      </p:sp>
+      <p:pic>
+        <p:nvPicPr>
+          <p:cNvPr id="3" name="Picture 2" descr="f3993ee9589802bd.png"/>
+          <p:cNvPicPr>
+            <a:picLocks noChangeAspect="1"/>
+          </p:cNvPicPr>
+          <p:nvPr/>
+        </p:nvPicPr>
+        <p:blipFill>
+          <a:blip r:embed="rId2"/>
+          <a:stretch>
+            <a:fillRect/>
+          </a:stretch>
+        </p:blipFill>
+        <p:spPr>
+          <a:xfrm>
+            <a:off x="3384688" y="1097280"/>
+            <a:ext cx="2374623" cy="5303520"/>
+          </a:xfrm>
+          <a:prstGeom prst="rect">
+            <a:avLst/>
+          </a:prstGeom>
+        </p:spPr>
+      </p:pic>
     </p:spTree>
   </p:cSld>
   <p:clrMapOvr>
@@ -3683,7 +4029,7 @@
                   <a:srgbClr val="22282E"/>
                 </a:solidFill>
               </a:rPr>
-              <a:t>•  Auditar los mecanismos de autenticación y descubrir formas de saltárselos: enumeración de usuarios, fuerza bruta, fallos en recuperación de contraseña, MFA débil y lógica de login rota. La autenticación es la puerta de la aplicación; romperla suele ser el hallazgo de mayor impacto.</a:t>
+              <a:t>•  Auditar los mecanismos de autenticación y descubrir formas de saltárselos: enumeración de usuarios, fuerza bruta, fallos en recuperación de contraseña, MFA débil y lógica de login rota. La…</a:t>
             </a:r>
           </a:p>
         </p:txBody>
@@ -4077,7 +4423,7 @@
                   <a:srgbClr val="0B3D2E"/>
                 </a:solidFill>
               </a:rPr>
-              <a:t>📖 Definiciones y características</a:t>
+              <a:t>🧠 Explicación en profundidad</a:t>
             </a:r>
           </a:p>
         </p:txBody>
@@ -4115,82 +4461,97 @@
                   <a:srgbClr val="22282E"/>
                 </a:solidFill>
               </a:rPr>
-              <a:t>•  Enumeración de usuarios: determinar qué cuentas existen por diferencias en las respuestas. Característica: habilita ataques dirigidos.</a:t>
-            </a:r>
-          </a:p>
-          <a:p>
-            <a:pPr>
-              <a:spcAft>
-                <a:spcPts val="600"/>
-              </a:spcAft>
-            </a:pPr>
-            <a:r>
-              <a:rPr sz="1500">
-                <a:solidFill>
-                  <a:srgbClr val="22282E"/>
-                </a:solidFill>
-              </a:rPr>
-              <a:t>•  Credential stuffing: probar credenciales filtradas de otras brechas. Característica: explota la reutilización de contraseñas.</a:t>
-            </a:r>
-          </a:p>
-          <a:p>
-            <a:pPr>
-              <a:spcAft>
-                <a:spcPts val="600"/>
-              </a:spcAft>
-            </a:pPr>
-            <a:r>
-              <a:rPr sz="1500">
-                <a:solidFill>
-                  <a:srgbClr val="22282E"/>
-                </a:solidFill>
-              </a:rPr>
-              <a:t>•  Rate limiting: límite de intentos por tiempo/IP. Característica: defensa esencial contra fuerza bruta.</a:t>
-            </a:r>
-          </a:p>
-          <a:p>
-            <a:pPr>
-              <a:spcAft>
-                <a:spcPts val="600"/>
-              </a:spcAft>
-            </a:pPr>
-            <a:r>
-              <a:rPr sz="1500">
-                <a:solidFill>
-                  <a:srgbClr val="22282E"/>
-                </a:solidFill>
-              </a:rPr>
-              <a:t>•  MFA (autenticación multifactor): segundo factor además de la contraseña. Característica: reduce el riesgo pero tiene bypass conocidos.</a:t>
-            </a:r>
-          </a:p>
-          <a:p>
-            <a:pPr>
-              <a:spcAft>
-                <a:spcPts val="600"/>
-              </a:spcAft>
-            </a:pPr>
-            <a:r>
-              <a:rPr sz="1500">
-                <a:solidFill>
-                  <a:srgbClr val="22282E"/>
-                </a:solidFill>
-              </a:rPr>
-              <a:t>•  Token de reset: valor temporal para recuperar contraseña. Característica: si es predecible o no expira, es explotable.</a:t>
-            </a:r>
-          </a:p>
-          <a:p>
-            <a:pPr>
-              <a:spcAft>
-                <a:spcPts val="600"/>
-              </a:spcAft>
-            </a:pPr>
-            <a:r>
-              <a:rPr sz="1500">
-                <a:solidFill>
-                  <a:srgbClr val="22282E"/>
-                </a:solidFill>
-              </a:rPr>
-              <a:t>•  Response timing: diferencias de tiempo que filtran información. Característica: canal lateral de enumeración.</a:t>
+              <a:t>•  La autenticación es el control que responde "¿quién eres?", y sus fallos (A07 en OWASP) son</a:t>
+            </a:r>
+          </a:p>
+          <a:p>
+            <a:pPr>
+              <a:spcAft>
+                <a:spcPts val="600"/>
+              </a:spcAft>
+            </a:pPr>
+            <a:r>
+              <a:rPr sz="1500">
+                <a:solidFill>
+                  <a:srgbClr val="22282E"/>
+                </a:solidFill>
+              </a:rPr>
+              <a:t>•  especialmente graves porque saltarse el login abre todo lo que hay detrás. Esta clase recorre</a:t>
+            </a:r>
+          </a:p>
+          <a:p>
+            <a:pPr>
+              <a:spcAft>
+                <a:spcPts val="600"/>
+              </a:spcAft>
+            </a:pPr>
+            <a:r>
+              <a:rPr sz="1500">
+                <a:solidFill>
+                  <a:srgbClr val="22282E"/>
+                </a:solidFill>
+              </a:rPr>
+              <a:t>•  la cadena completa de ataques a la autenticación web, y su hilo conductor es que la robustez de una</a:t>
+            </a:r>
+          </a:p>
+          <a:p>
+            <a:pPr>
+              <a:spcAft>
+                <a:spcPts val="600"/>
+              </a:spcAft>
+            </a:pPr>
+            <a:r>
+              <a:rPr sz="1500">
+                <a:solidFill>
+                  <a:srgbClr val="22282E"/>
+                </a:solidFill>
+              </a:rPr>
+              <a:t>•  puerta se mide por su eslabón más débil: de nada sirve una contraseña fuerte si el sistema revela</a:t>
+            </a:r>
+          </a:p>
+          <a:p>
+            <a:pPr>
+              <a:spcAft>
+                <a:spcPts val="600"/>
+              </a:spcAft>
+            </a:pPr>
+            <a:r>
+              <a:rPr sz="1500">
+                <a:solidFill>
+                  <a:srgbClr val="22282E"/>
+                </a:solidFill>
+              </a:rPr>
+              <a:t>•  qué usuarios existen, no limita los intentos, o tiene una recuperación de contraseña rota.</a:t>
+            </a:r>
+          </a:p>
+          <a:p>
+            <a:pPr>
+              <a:spcAft>
+                <a:spcPts val="600"/>
+              </a:spcAft>
+            </a:pPr>
+            <a:r>
+              <a:rPr sz="1500">
+                <a:solidFill>
+                  <a:srgbClr val="22282E"/>
+                </a:solidFill>
+              </a:rPr>
+              <a:t>•  Antes de atacar una contraseña, el atacante quiere saber qué cuentas existen, y muchas</a:t>
+            </a:r>
+          </a:p>
+          <a:p>
+            <a:pPr>
+              <a:spcAft>
+                <a:spcPts val="600"/>
+              </a:spcAft>
+            </a:pPr>
+            <a:r>
+              <a:rPr sz="1500">
+                <a:solidFill>
+                  <a:srgbClr val="22282E"/>
+                </a:solidFill>
+              </a:rPr>
+              <a:t>•  aplicaciones se lo dicen sin querer. Si el login responde "usuario no encontrado" frente a</a:t>
             </a:r>
           </a:p>
         </p:txBody>
@@ -4241,7 +4602,7 @@
                   <a:srgbClr val="0B3D2E"/>
                 </a:solidFill>
               </a:rPr>
-              <a:t>🧰 Herramientas y preparación</a:t>
+              <a:t>📖 Definiciones y características</a:t>
             </a:r>
           </a:p>
         </p:txBody>
@@ -4279,37 +4640,82 @@
                   <a:srgbClr val="22282E"/>
                 </a:solidFill>
               </a:rPr>
-              <a:t>•  PortSwigger labs de autenticación y DVWA.</a:t>
-            </a:r>
-          </a:p>
-          <a:p>
-            <a:pPr>
-              <a:spcAft>
-                <a:spcPts val="600"/>
-              </a:spcAft>
-            </a:pPr>
-            <a:r>
-              <a:rPr sz="1500">
-                <a:solidFill>
-                  <a:srgbClr val="22282E"/>
-                </a:solidFill>
-              </a:rPr>
-              <a:t>•  Burp Intruder para fuerza bruta y enumeración.</a:t>
-            </a:r>
-          </a:p>
-          <a:p>
-            <a:pPr>
-              <a:spcAft>
-                <a:spcPts val="600"/>
-              </a:spcAft>
-            </a:pPr>
-            <a:r>
-              <a:rPr sz="1500">
-                <a:solidFill>
-                  <a:srgbClr val="22282E"/>
-                </a:solidFill>
-              </a:rPr>
-              <a:t>•  Listas de usuarios/contraseñas de SecLists.</a:t>
+              <a:t>•  Enumeración de usuarios: determinar qué cuentas existen por diferencias en las respuestas. Característica: habilita ataques dirigidos.</a:t>
+            </a:r>
+          </a:p>
+          <a:p>
+            <a:pPr>
+              <a:spcAft>
+                <a:spcPts val="600"/>
+              </a:spcAft>
+            </a:pPr>
+            <a:r>
+              <a:rPr sz="1500">
+                <a:solidFill>
+                  <a:srgbClr val="22282E"/>
+                </a:solidFill>
+              </a:rPr>
+              <a:t>•  Credential stuffing: probar credenciales filtradas de otras brechas. Característica: explota la reutilización de contraseñas.</a:t>
+            </a:r>
+          </a:p>
+          <a:p>
+            <a:pPr>
+              <a:spcAft>
+                <a:spcPts val="600"/>
+              </a:spcAft>
+            </a:pPr>
+            <a:r>
+              <a:rPr sz="1500">
+                <a:solidFill>
+                  <a:srgbClr val="22282E"/>
+                </a:solidFill>
+              </a:rPr>
+              <a:t>•  Rate limiting: límite de intentos por tiempo/IP. Característica: defensa esencial contra fuerza bruta.</a:t>
+            </a:r>
+          </a:p>
+          <a:p>
+            <a:pPr>
+              <a:spcAft>
+                <a:spcPts val="600"/>
+              </a:spcAft>
+            </a:pPr>
+            <a:r>
+              <a:rPr sz="1500">
+                <a:solidFill>
+                  <a:srgbClr val="22282E"/>
+                </a:solidFill>
+              </a:rPr>
+              <a:t>•  MFA (autenticación multifactor): segundo factor además de la contraseña. Característica: reduce el riesgo pero tiene bypass conocidos.</a:t>
+            </a:r>
+          </a:p>
+          <a:p>
+            <a:pPr>
+              <a:spcAft>
+                <a:spcPts val="600"/>
+              </a:spcAft>
+            </a:pPr>
+            <a:r>
+              <a:rPr sz="1500">
+                <a:solidFill>
+                  <a:srgbClr val="22282E"/>
+                </a:solidFill>
+              </a:rPr>
+              <a:t>•  Token de reset: valor temporal para recuperar contraseña. Característica: si es predecible o no expira, es explotable.</a:t>
+            </a:r>
+          </a:p>
+          <a:p>
+            <a:pPr>
+              <a:spcAft>
+                <a:spcPts val="600"/>
+              </a:spcAft>
+            </a:pPr>
+            <a:r>
+              <a:rPr sz="1500">
+                <a:solidFill>
+                  <a:srgbClr val="22282E"/>
+                </a:solidFill>
+              </a:rPr>
+              <a:t>•  Response timing: diferencias de tiempo que filtran información. Característica: canal lateral de enumeración.</a:t>
             </a:r>
           </a:p>
         </p:txBody>
@@ -4360,7 +4766,7 @@
                   <a:srgbClr val="0B3D2E"/>
                 </a:solidFill>
               </a:rPr>
-              <a:t>🧪 Laboratorio guiado</a:t>
+              <a:t>📔 Glosario</a:t>
             </a:r>
           </a:p>
         </p:txBody>
@@ -4398,97 +4804,97 @@
                   <a:srgbClr val="22282E"/>
                 </a:solidFill>
               </a:rPr>
-              <a:t>•  Prueba el login con un usuario inexistente y otro existente; compara mensajes y tiempos (enumeración).</a:t>
-            </a:r>
-          </a:p>
-          <a:p>
-            <a:pPr>
-              <a:spcAft>
-                <a:spcPts val="600"/>
-              </a:spcAft>
-            </a:pPr>
-            <a:r>
-              <a:rPr sz="1500">
-                <a:solidFill>
-                  <a:srgbClr val="22282E"/>
-                </a:solidFill>
-              </a:rPr>
-              <a:t>•  Con Intruder, enumera usuarios válidos por diferencia de respuesta.</a:t>
-            </a:r>
-          </a:p>
-          <a:p>
-            <a:pPr>
-              <a:spcAft>
-                <a:spcPts val="600"/>
-              </a:spcAft>
-            </a:pPr>
-            <a:r>
-              <a:rPr sz="1500">
-                <a:solidFill>
-                  <a:srgbClr val="22282E"/>
-                </a:solidFill>
-              </a:rPr>
-              <a:t>•  Ejecuta fuerza bruta de contraseña sobre un usuario válido en un lab sin rate limiting.</a:t>
-            </a:r>
-          </a:p>
-          <a:p>
-            <a:pPr>
-              <a:spcAft>
-                <a:spcPts val="600"/>
-              </a:spcAft>
-            </a:pPr>
-            <a:r>
-              <a:rPr sz="1500">
-                <a:solidFill>
-                  <a:srgbClr val="22282E"/>
-                </a:solidFill>
-              </a:rPr>
-              <a:t>•  Analiza el flujo de recuperación de contraseña: ¿el token es predecible?, ¿expira?, ¿se puede reusar?</a:t>
-            </a:r>
-          </a:p>
-          <a:p>
-            <a:pPr>
-              <a:spcAft>
-                <a:spcPts val="600"/>
-              </a:spcAft>
-            </a:pPr>
-            <a:r>
-              <a:rPr sz="1500">
-                <a:solidFill>
-                  <a:srgbClr val="22282E"/>
-                </a:solidFill>
-              </a:rPr>
-              <a:t>•  Prueba un bypass de MFA: reenviar la petición sin el paso 2, reutilizar código, o forzar el código (si no hay límite).</a:t>
-            </a:r>
-          </a:p>
-          <a:p>
-            <a:pPr>
-              <a:spcAft>
-                <a:spcPts val="600"/>
-              </a:spcAft>
-            </a:pPr>
-            <a:r>
-              <a:rPr sz="1500">
-                <a:solidFill>
-                  <a:srgbClr val="22282E"/>
-                </a:solidFill>
-              </a:rPr>
-              <a:t>•  Busca lógica rota: acceder a /account con un estado de sesión parcial.</a:t>
-            </a:r>
-          </a:p>
-          <a:p>
-            <a:pPr>
-              <a:spcAft>
-                <a:spcPts val="600"/>
-              </a:spcAft>
-            </a:pPr>
-            <a:r>
-              <a:rPr sz="1500">
-                <a:solidFill>
-                  <a:srgbClr val="22282E"/>
-                </a:solidFill>
-              </a:rPr>
-              <a:t>•  Documenta cada debilidad con evidencia y su corrección.</a:t>
+              <a:t>•  Término — Definición concisa</a:t>
+            </a:r>
+          </a:p>
+          <a:p>
+            <a:pPr>
+              <a:spcAft>
+                <a:spcPts val="600"/>
+              </a:spcAft>
+            </a:pPr>
+            <a:r>
+              <a:rPr sz="1500">
+                <a:solidFill>
+                  <a:srgbClr val="22282E"/>
+                </a:solidFill>
+              </a:rPr>
+              <a:t>•  Autenticación — Control que verifica la identidad del usuario</a:t>
+            </a:r>
+          </a:p>
+          <a:p>
+            <a:pPr>
+              <a:spcAft>
+                <a:spcPts val="600"/>
+              </a:spcAft>
+            </a:pPr>
+            <a:r>
+              <a:rPr sz="1500">
+                <a:solidFill>
+                  <a:srgbClr val="22282E"/>
+                </a:solidFill>
+              </a:rPr>
+              <a:t>•  Enumeración de usuarios — Descubrir qué cuentas existen por respuestas o tiempos</a:t>
+            </a:r>
+          </a:p>
+          <a:p>
+            <a:pPr>
+              <a:spcAft>
+                <a:spcPts val="600"/>
+              </a:spcAft>
+            </a:pPr>
+            <a:r>
+              <a:rPr sz="1500">
+                <a:solidFill>
+                  <a:srgbClr val="22282E"/>
+                </a:solidFill>
+              </a:rPr>
+              <a:t>•  Canal lateral temporal — Tiempo de respuesta distinto que filtra si la cuenta existe</a:t>
+            </a:r>
+          </a:p>
+          <a:p>
+            <a:pPr>
+              <a:spcAft>
+                <a:spcPts val="600"/>
+              </a:spcAft>
+            </a:pPr>
+            <a:r>
+              <a:rPr sz="1500">
+                <a:solidFill>
+                  <a:srgbClr val="22282E"/>
+                </a:solidFill>
+              </a:rPr>
+              <a:t>•  Respuestas neutras — Mensaje y tiempo idénticos existan o no las cuentas</a:t>
+            </a:r>
+          </a:p>
+          <a:p>
+            <a:pPr>
+              <a:spcAft>
+                <a:spcPts val="600"/>
+              </a:spcAft>
+            </a:pPr>
+            <a:r>
+              <a:rPr sz="1500">
+                <a:solidFill>
+                  <a:srgbClr val="22282E"/>
+                </a:solidFill>
+              </a:rPr>
+              <a:t>•  Fuerza bruta — Probar muchas contraseñas contra una cuenta</a:t>
+            </a:r>
+          </a:p>
+          <a:p>
+            <a:pPr>
+              <a:spcAft>
+                <a:spcPts val="600"/>
+              </a:spcAft>
+            </a:pPr>
+            <a:r>
+              <a:rPr sz="1500">
+                <a:solidFill>
+                  <a:srgbClr val="22282E"/>
+                </a:solidFill>
+              </a:rPr>
+              <a:t>•  Password spraying — Una contraseña común contra muchas cuentas</a:t>
             </a:r>
           </a:p>
         </p:txBody>
@@ -4539,7 +4945,7 @@
                   <a:srgbClr val="0B3D2E"/>
                 </a:solidFill>
               </a:rPr>
-              <a:t>✍️ Ejercicios</a:t>
+              <a:t>🧰 Herramientas y preparación</a:t>
             </a:r>
           </a:p>
         </p:txBody>
@@ -4577,82 +4983,37 @@
                   <a:srgbClr val="22282E"/>
                 </a:solidFill>
               </a:rPr>
-              <a:t>•  Detecta enumeración de usuarios por mensaje y por tiempo, por separado.</a:t>
-            </a:r>
-          </a:p>
-          <a:p>
-            <a:pPr>
-              <a:spcAft>
-                <a:spcPts val="600"/>
-              </a:spcAft>
-            </a:pPr>
-            <a:r>
-              <a:rPr sz="1500">
-                <a:solidFill>
-                  <a:srgbClr val="22282E"/>
-                </a:solidFill>
-              </a:rPr>
-              <a:t>•  Diseña un ataque de credential stuffing y explica su defensa (MFA, detección de reuso).</a:t>
-            </a:r>
-          </a:p>
-          <a:p>
-            <a:pPr>
-              <a:spcAft>
-                <a:spcPts val="600"/>
-              </a:spcAft>
-            </a:pPr>
-            <a:r>
-              <a:rPr sz="1500">
-                <a:solidFill>
-                  <a:srgbClr val="22282E"/>
-                </a:solidFill>
-              </a:rPr>
-              <a:t>•  Analiza un token de reset y evalúa su entropía y expiración.</a:t>
-            </a:r>
-          </a:p>
-          <a:p>
-            <a:pPr>
-              <a:spcAft>
-                <a:spcPts val="600"/>
-              </a:spcAft>
-            </a:pPr>
-            <a:r>
-              <a:rPr sz="1500">
-                <a:solidFill>
-                  <a:srgbClr val="22282E"/>
-                </a:solidFill>
-              </a:rPr>
-              <a:t>•  Enumera 4 bypass de MFA reales y cómo prevenirlos.</a:t>
-            </a:r>
-          </a:p>
-          <a:p>
-            <a:pPr>
-              <a:spcAft>
-                <a:spcPts val="600"/>
-              </a:spcAft>
-            </a:pPr>
-            <a:r>
-              <a:rPr sz="1500">
-                <a:solidFill>
-                  <a:srgbClr val="22282E"/>
-                </a:solidFill>
-              </a:rPr>
-              <a:t>•  Explica por qué los mensajes de error deben ser genéricos.</a:t>
-            </a:r>
-          </a:p>
-          <a:p>
-            <a:pPr>
-              <a:spcAft>
-                <a:spcPts val="600"/>
-              </a:spcAft>
-            </a:pPr>
-            <a:r>
-              <a:rPr sz="1500">
-                <a:solidFill>
-                  <a:srgbClr val="22282E"/>
-                </a:solidFill>
-              </a:rPr>
-              <a:t>•  Diseña una política de rate limiting sensata (por cuenta y por IP).</a:t>
+              <a:t>•  PortSwigger labs de autenticación y DVWA.</a:t>
+            </a:r>
+          </a:p>
+          <a:p>
+            <a:pPr>
+              <a:spcAft>
+                <a:spcPts val="600"/>
+              </a:spcAft>
+            </a:pPr>
+            <a:r>
+              <a:rPr sz="1500">
+                <a:solidFill>
+                  <a:srgbClr val="22282E"/>
+                </a:solidFill>
+              </a:rPr>
+              <a:t>•  Burp Intruder para fuerza bruta y enumeración.</a:t>
+            </a:r>
+          </a:p>
+          <a:p>
+            <a:pPr>
+              <a:spcAft>
+                <a:spcPts val="600"/>
+              </a:spcAft>
+            </a:pPr>
+            <a:r>
+              <a:rPr sz="1500">
+                <a:solidFill>
+                  <a:srgbClr val="22282E"/>
+                </a:solidFill>
+              </a:rPr>
+              <a:t>•  Listas de usuarios/contraseñas de SecLists.</a:t>
             </a:r>
           </a:p>
         </p:txBody>
@@ -4703,7 +5064,7 @@
                   <a:srgbClr val="0B3D2E"/>
                 </a:solidFill>
               </a:rPr>
-              <a:t>📝 Reto verificable</a:t>
+              <a:t>🧪 Laboratorio guiado</a:t>
             </a:r>
           </a:p>
         </p:txBody>
@@ -4741,22 +5102,97 @@
                   <a:srgbClr val="22282E"/>
                 </a:solidFill>
               </a:rPr>
-              <a:t>•  Resuelve un lab de PortSwigger que combine enumeración de usuarios + fuerza bruta y accede a la cuenta objetivo, o un lab de bypass de MFA.</a:t>
-            </a:r>
-          </a:p>
-          <a:p>
-            <a:pPr>
-              <a:spcAft>
-                <a:spcPts val="600"/>
-              </a:spcAft>
-            </a:pPr>
-            <a:r>
-              <a:rPr sz="1500">
-                <a:solidFill>
-                  <a:srgbClr val="22282E"/>
-                </a:solidFill>
-              </a:rPr>
-              <a:t>•  Criterio de aceptación: el lab queda resuelto, documentas la señal que reveló el usuario válido (o el fallo de MFA), la credencial/técnica y los controles que lo habrían evitado.</a:t>
+              <a:t>•  Prueba el login con un usuario inexistente y otro existente; compara mensajes y tiempos (enumeración).</a:t>
+            </a:r>
+          </a:p>
+          <a:p>
+            <a:pPr>
+              <a:spcAft>
+                <a:spcPts val="600"/>
+              </a:spcAft>
+            </a:pPr>
+            <a:r>
+              <a:rPr sz="1500">
+                <a:solidFill>
+                  <a:srgbClr val="22282E"/>
+                </a:solidFill>
+              </a:rPr>
+              <a:t>•  Con Intruder, enumera usuarios válidos por diferencia de respuesta.</a:t>
+            </a:r>
+          </a:p>
+          <a:p>
+            <a:pPr>
+              <a:spcAft>
+                <a:spcPts val="600"/>
+              </a:spcAft>
+            </a:pPr>
+            <a:r>
+              <a:rPr sz="1500">
+                <a:solidFill>
+                  <a:srgbClr val="22282E"/>
+                </a:solidFill>
+              </a:rPr>
+              <a:t>•  Ejecuta fuerza bruta de contraseña sobre un usuario válido en un lab sin rate limiting.</a:t>
+            </a:r>
+          </a:p>
+          <a:p>
+            <a:pPr>
+              <a:spcAft>
+                <a:spcPts val="600"/>
+              </a:spcAft>
+            </a:pPr>
+            <a:r>
+              <a:rPr sz="1500">
+                <a:solidFill>
+                  <a:srgbClr val="22282E"/>
+                </a:solidFill>
+              </a:rPr>
+              <a:t>•  Analiza el flujo de recuperación de contraseña: ¿el token es predecible?, ¿expira?, ¿se puede reusar?</a:t>
+            </a:r>
+          </a:p>
+          <a:p>
+            <a:pPr>
+              <a:spcAft>
+                <a:spcPts val="600"/>
+              </a:spcAft>
+            </a:pPr>
+            <a:r>
+              <a:rPr sz="1500">
+                <a:solidFill>
+                  <a:srgbClr val="22282E"/>
+                </a:solidFill>
+              </a:rPr>
+              <a:t>•  Prueba un bypass de MFA: reenviar la petición sin el paso 2, reutilizar código, o forzar el código (si no hay límite).</a:t>
+            </a:r>
+          </a:p>
+          <a:p>
+            <a:pPr>
+              <a:spcAft>
+                <a:spcPts val="600"/>
+              </a:spcAft>
+            </a:pPr>
+            <a:r>
+              <a:rPr sz="1500">
+                <a:solidFill>
+                  <a:srgbClr val="22282E"/>
+                </a:solidFill>
+              </a:rPr>
+              <a:t>•  Busca lógica rota: acceder a /account con un estado de sesión parcial.</a:t>
+            </a:r>
+          </a:p>
+          <a:p>
+            <a:pPr>
+              <a:spcAft>
+                <a:spcPts val="600"/>
+              </a:spcAft>
+            </a:pPr>
+            <a:r>
+              <a:rPr sz="1500">
+                <a:solidFill>
+                  <a:srgbClr val="22282E"/>
+                </a:solidFill>
+              </a:rPr>
+              <a:t>•  Documenta cada debilidad con evidencia y su corrección.</a:t>
             </a:r>
           </a:p>
         </p:txBody>
